--- a/decks/hist-medicine/hist-medicine_ch4_treatment-prevention.pptx
+++ b/decks/hist-medicine/hist-medicine_ch4_treatment-prevention.pptx
@@ -125,30 +125,30 @@
   <p:extLst>
     <p:ext uri="{521415D9-36F7-43E2-AB2F-B90AF26B5E84}">
       <p14:sectionLst xmlns:p14="http://schemas.microsoft.com/office/powerpoint/2010/main">
-        <p14:section name="Opening" id="{be3b1053-8809-6f13-cb95-d0fca7a80c96}">
+        <p14:section name="Opening" id="{510641e3-bdfe-add8-8429-3a3bf9603948}">
           <p14:sldIdLst>
             <p14:sldId id="256"/>
           </p14:sldIdLst>
         </p14:section>
-        <p14:section name="Gate" id="{9df2c12d-5bca-49ab-46ca-49ebbe88bbdd}">
+        <p14:section name="Gate" id="{8e7779a1-e9e7-33e6-2487-8e599e45bd76}">
           <p14:sldIdLst>
             <p14:sldId id="257"/>
             <p14:sldId id="258"/>
           </p14:sldIdLst>
         </p14:section>
-        <p14:section name="Pre-teach" id="{7c6c9f1e-4e7d-e38e-8312-62219ca6f433}">
+        <p14:section name="Pre-teach" id="{4d49f9e4-1f24-b222-42ba-7ee09ed1e50c}">
           <p14:sldIdLst>
             <p14:sldId id="259"/>
             <p14:sldId id="260"/>
           </p14:sldIdLst>
         </p14:section>
-        <p14:section name="Read-along" id="{f99c342b-d5c6-3da5-7e15-ce40312e1a63}">
+        <p14:section name="Read-along" id="{bcf74ec7-80c3-0841-4e05-bb2197ad90dc}">
           <p14:sldIdLst>
             <p14:sldId id="261"/>
             <p14:sldId id="262"/>
           </p14:sldIdLst>
         </p14:section>
-        <p14:section name="Teach" id="{b6ad2c89-8052-9cf8-3743-3dd5487c1ce9}">
+        <p14:section name="Teach" id="{777d4f10-de02-0e9e-be4e-d47cf9513a97}">
           <p14:sldIdLst>
             <p14:sldId id="263"/>
             <p14:sldId id="264"/>
@@ -156,7 +156,7 @@
             <p14:sldId id="266"/>
           </p14:sldIdLst>
         </p14:section>
-        <p14:section name="Routes" id="{1be688a5-505b-6618-190a-524b71f0b88a}">
+        <p14:section name="Routes" id="{0b30d418-fda5-fc15-d04a-53b36a0c31c1}">
           <p14:sldIdLst>
             <p14:sldId id="267"/>
             <p14:sldId id="268"/>
@@ -164,12 +164,12 @@
             <p14:sldId id="270"/>
           </p14:sldIdLst>
         </p14:section>
-        <p14:section name="Close" id="{0b8e5124-9522-4627-a34e-b7bad24de73e}">
+        <p14:section name="Close" id="{dd007d20-325e-5ee5-7b0f-0f2213b3415f}">
           <p14:sldIdLst>
             <p14:sldId id="271"/>
           </p14:sldIdLst>
         </p14:section>
-        <p14:section name="Answers" id="{9e1ae7f4-9325-fe52-706f-f29634ea3dca}">
+        <p14:section name="Answers" id="{99cfbea7-c141-f0e1-12b3-c7cb462a9202}">
           <p14:sldIdLst>
             <p14:sldId id="272"/>
             <p14:sldId id="273"/>
@@ -1233,7 +1233,7 @@
               <a:rPr lang="en-US" dirty="0"/>
               <a:t>Exit ticket — individual, silent, on a slip or mini-whiteboard. Recall before help: no notes, no lanes, no hints. Collect before pupils leave.
 Question: Which of these is a treatment, not a prevention?
-Answer: D   Bleeding a patient who has a fever. Treatment is what you do when you are already ill. Bleeding a feverish patient treats an illness; the other three are done to stay well.
+Answer: C   Bleeding a patient who has a fever. Treatment is what you do when you are already ill. Bleeding a feverish patient treats an illness; the other three are done to stay well.
 Source of this question: gate item 1 re-asked (options rotated) — this chapter has no third quick-check module.
 The ebook also holds task 3, "Why prevention mattered", for homework or the next lesson's do now.
 Sort the slips: correct → ready to move on; incorrect → start next lesson in the pre-teach group, with the read-along and the Support lane. Same destination next time.</a:t>
@@ -1416,7 +1416,7 @@
             <a:r>
               <a:rPr lang="en-US" dirty="0"/>
               <a:t>Answers — task 2: Name the treatment. Reveal the answer; pupils mark their own work in a different colour, then read the "why" together. Same destination for every lane, so one answer serves the whole class.
-Answer: A   Bloodletting, to remove excess blood and rebalance the humours
+Answer: D   Bloodletting, to remove excess blood and rebalance the humours
 Why: Knife, leeches and heated cups are three ways of doing the same thing: removing blood. All three are bloodletting, based on the belief that an excess humour had to be drained.
 Ask a Support pupil to explain one step, and a Stretch pupil to share their extension.</a:t>
             </a:r>
@@ -1507,7 +1507,7 @@
             <a:r>
               <a:rPr lang="en-US" dirty="0"/>
               <a:t>Answers — exit ticket: Exit ticket. Reveal the answer; pupils mark their own work in a different colour, then read the "why" together. Same destination for every lane, so one answer serves the whole class.
-Answer: D   Bleeding a patient who has a fever
+Answer: C   Bleeding a patient who has a fever
 Why: Treatment is what you do when you are already ill. Bleeding a feverish patient treats an illness; the other three are done to stay well.
 Ask a Support pupil to explain one step, and a Stretch pupil to share their extension.</a:t>
             </a:r>
@@ -1598,9 +1598,9 @@
             <a:r>
               <a:rPr lang="en-US" dirty="0"/>
               <a:t>Do now — retrieval. Silent, no notes, no help: recall comes before any support. Give about four minutes.
-1. Which of these is a treatment, not a prevention?  →  A   Bleeding a patient who has a fever
+1. Which of these is a treatment, not a prevention?  →  D   Bleeding a patient who has a fever
 2. ___ meant making a patient vomit or empty their bowels to remove an excess humour.  →  Purging
-3. Why did medieval physicians often give several different remedies for one illness?  →  A   They believed each symptom was a separate imbalance of the humours
+3. Why did medieval physicians often give several different remedies for one illness?  →  B   They believed each symptom was a separate imbalance of the humours
 Circulate: who gets 3/3 (Stretch route), 2/3 (Core), 0–1 (Support)? Use this to route pupils later in the lesson.</a:t>
             </a:r>
             <a:endParaRPr lang="en-US" dirty="0"/>
@@ -1690,9 +1690,9 @@
             <a:r>
               <a:rPr lang="en-US" dirty="0"/>
               <a:t>Answers — pupils mark their own in a different colour, then hands up for 3/3, 2/3, 1/3.
-1. A   Bleeding a patient who has a fever. Treatment is what you do when you are already ill. Bleeding a feverish patient treats an illness; the other three are done to stay well.
+1. D   Bleeding a patient who has a fever. Treatment is what you do when you are already ill. Bleeding a feverish patient treats an illness; the other three are done to stay well.
 2. Purging. Purging used emetics, laxatives or enemas to empty the body; bloodletting removed blood instead.
-3. A   They believed each symptom was a separate imbalance of the humours. Physicians treated each symptom separately, believing each was its own imbalance, so one illness could get several, even contradictory, remedies.
+3. B   They believed each symptom was a separate imbalance of the humours. Physicians treated each symptom separately, believing each was its own imbalance, so one illness could get several, even contradictory, remedies.
 Say the route each score points to: 3/3 Stretch, 2/3 Core, 0–1 Support. Pupils may choose to move up.</a:t>
             </a:r>
             <a:endParaRPr lang="en-US" dirty="0"/>
@@ -8083,7 +8083,7 @@
                 <a:ea typeface="Calibri" pitchFamily="34" charset="-122"/>
                 <a:cs typeface="Calibri" pitchFamily="34" charset="-120"/>
               </a:rPr>
-              <a:t>Bloodletting, to remove excess blood and rebalance the humours</a:t>
+              <a:t>Purging, to empty the stomach and rebalance the humours</a:t>
             </a:r>
             <a:endParaRPr lang="en-US" sz="2600" dirty="0"/>
           </a:p>
@@ -8120,7 +8120,7 @@
                 <a:ea typeface="Calibri" pitchFamily="34" charset="-122"/>
                 <a:cs typeface="Calibri" pitchFamily="34" charset="-120"/>
               </a:rPr>
-              <a:t>Purging, to empty the stomach and rebalance the humours</a:t>
+              <a:t>Flagellation, to show God the patient is sorry</a:t>
             </a:r>
             <a:endParaRPr lang="en-US" sz="2600" dirty="0"/>
           </a:p>
@@ -8157,7 +8157,7 @@
                 <a:ea typeface="Calibri" pitchFamily="34" charset="-122"/>
                 <a:cs typeface="Calibri" pitchFamily="34" charset="-120"/>
               </a:rPr>
-              <a:t>Flagellation, to show God the patient is sorry</a:t>
+              <a:t>Purifying the air, to drive away miasma</a:t>
             </a:r>
             <a:endParaRPr lang="en-US" sz="2600" dirty="0"/>
           </a:p>
@@ -8194,7 +8194,7 @@
                 <a:ea typeface="Calibri" pitchFamily="34" charset="-122"/>
                 <a:cs typeface="Calibri" pitchFamily="34" charset="-120"/>
               </a:rPr>
-              <a:t>Purifying the air, to drive away miasma</a:t>
+              <a:t>Bloodletting, to remove excess blood and rebalance the humours</a:t>
             </a:r>
             <a:endParaRPr lang="en-US" sz="2600" dirty="0"/>
           </a:p>
@@ -9595,7 +9595,7 @@
                 <a:ea typeface="Calibri" pitchFamily="34" charset="-122"/>
                 <a:cs typeface="Calibri" pitchFamily="34" charset="-120"/>
               </a:rPr>
-              <a:t>Going to church every Sunday</a:t>
+              <a:t>Not overeating</a:t>
             </a:r>
             <a:endParaRPr lang="en-US" sz="2400" dirty="0"/>
           </a:p>
@@ -9669,7 +9669,7 @@
                 <a:ea typeface="Calibri" pitchFamily="34" charset="-122"/>
                 <a:cs typeface="Calibri" pitchFamily="34" charset="-120"/>
               </a:rPr>
-              <a:t>Not overeating</a:t>
+              <a:t>Bleeding a patient who has a fever</a:t>
             </a:r>
             <a:endParaRPr lang="en-US" sz="2400" dirty="0"/>
           </a:p>
@@ -9706,7 +9706,7 @@
                 <a:ea typeface="Calibri" pitchFamily="34" charset="-122"/>
                 <a:cs typeface="Calibri" pitchFamily="34" charset="-120"/>
               </a:rPr>
-              <a:t>Bleeding a patient who has a fever</a:t>
+              <a:t>Going to church every Sunday</a:t>
             </a:r>
             <a:endParaRPr lang="en-US" sz="2400" dirty="0"/>
           </a:p>
@@ -10718,7 +10718,7 @@
                 <a:ea typeface="Cambria" pitchFamily="34" charset="-122"/>
                 <a:cs typeface="Cambria" pitchFamily="34" charset="-120"/>
               </a:rPr>
-              <a:t>A   Bloodletting, to remove excess blood and rebalance the humours</a:t>
+              <a:t>D   Bloodletting, to remove excess blood and rebalance the humours</a:t>
             </a:r>
             <a:endParaRPr lang="en-US" sz="1800" dirty="0"/>
           </a:p>
@@ -11177,7 +11177,7 @@
                 <a:ea typeface="Cambria" pitchFamily="34" charset="-122"/>
                 <a:cs typeface="Cambria" pitchFamily="34" charset="-120"/>
               </a:rPr>
-              <a:t>D   Bleeding a patient who has a fever</a:t>
+              <a:t>C   Bleeding a patient who has a fever</a:t>
             </a:r>
             <a:endParaRPr lang="en-US" sz="1800" dirty="0"/>
           </a:p>
@@ -11711,7 +11711,7 @@
                 <a:ea typeface="Calibri" pitchFamily="34" charset="-122"/>
                 <a:cs typeface="Calibri" pitchFamily="34" charset="-120"/>
               </a:rPr>
-              <a:t>Bleeding a patient who has a fever</a:t>
+              <a:t>Going to church every Sunday</a:t>
             </a:r>
             <a:endParaRPr lang="en-US" sz="1800" dirty="0"/>
           </a:p>
@@ -11748,7 +11748,7 @@
                 <a:ea typeface="Calibri" pitchFamily="34" charset="-122"/>
                 <a:cs typeface="Calibri" pitchFamily="34" charset="-120"/>
               </a:rPr>
-              <a:t>Going to church every Sunday</a:t>
+              <a:t>Not overeating</a:t>
             </a:r>
             <a:endParaRPr lang="en-US" sz="1800" dirty="0"/>
           </a:p>
@@ -11822,7 +11822,7 @@
                 <a:ea typeface="Calibri" pitchFamily="34" charset="-122"/>
                 <a:cs typeface="Calibri" pitchFamily="34" charset="-120"/>
               </a:rPr>
-              <a:t>Not overeating</a:t>
+              <a:t>Bleeding a patient who has a fever</a:t>
             </a:r>
             <a:endParaRPr lang="en-US" sz="1800" dirty="0"/>
           </a:p>
@@ -12224,7 +12224,7 @@
                 <a:ea typeface="Calibri" pitchFamily="34" charset="-122"/>
                 <a:cs typeface="Calibri" pitchFamily="34" charset="-120"/>
               </a:rPr>
-              <a:t>They believed each symptom was a separate imbalance of the humours</a:t>
+              <a:t>They had read about germs and wanted to be safe</a:t>
             </a:r>
             <a:endParaRPr lang="en-US" sz="1800" dirty="0"/>
           </a:p>
@@ -12261,7 +12261,7 @@
                 <a:ea typeface="Calibri" pitchFamily="34" charset="-122"/>
                 <a:cs typeface="Calibri" pitchFamily="34" charset="-120"/>
               </a:rPr>
-              <a:t>They were paid for every remedy they prescribed</a:t>
+              <a:t>They believed each symptom was a separate imbalance of the humours</a:t>
             </a:r>
             <a:endParaRPr lang="en-US" sz="1800" dirty="0"/>
           </a:p>
@@ -12335,7 +12335,7 @@
                 <a:ea typeface="Calibri" pitchFamily="34" charset="-122"/>
                 <a:cs typeface="Calibri" pitchFamily="34" charset="-120"/>
               </a:rPr>
-              <a:t>They had read about germs and wanted to be safe</a:t>
+              <a:t>They were paid for every remedy they prescribed</a:t>
             </a:r>
             <a:endParaRPr lang="en-US" sz="1800" dirty="0"/>
           </a:p>
@@ -12736,7 +12736,7 @@
                 <a:ea typeface="Calibri" pitchFamily="34" charset="-122"/>
                 <a:cs typeface="Calibri" pitchFamily="34" charset="-120"/>
               </a:rPr>
-              <a:t>A   Bleeding a patient who has a fever</a:t>
+              <a:t>D   Bleeding a patient who has a fever</a:t>
             </a:r>
             <a:endParaRPr lang="en-US" sz="2200" dirty="0"/>
           </a:p>
@@ -13196,7 +13196,7 @@
                 <a:ea typeface="Calibri" pitchFamily="34" charset="-122"/>
                 <a:cs typeface="Calibri" pitchFamily="34" charset="-120"/>
               </a:rPr>
-              <a:t>A   They believed each symptom was a separate imbalance of the humours</a:t>
+              <a:t>B   They believed each symptom was a separate imbalance of the humours</a:t>
             </a:r>
             <a:endParaRPr lang="en-US" sz="2200" dirty="0"/>
           </a:p>

--- a/decks/hist-medicine/hist-medicine_ch4_treatment-prevention.pptx
+++ b/decks/hist-medicine/hist-medicine_ch4_treatment-prevention.pptx
@@ -125,30 +125,30 @@
   <p:extLst>
     <p:ext uri="{521415D9-36F7-43E2-AB2F-B90AF26B5E84}">
       <p14:sectionLst xmlns:p14="http://schemas.microsoft.com/office/powerpoint/2010/main">
-        <p14:section name="Opening" id="{510641e3-bdfe-add8-8429-3a3bf9603948}">
+        <p14:section name="Opening" id="{0aaef5fb-e583-b66e-a3e8-0565b9346040}">
           <p14:sldIdLst>
             <p14:sldId id="256"/>
           </p14:sldIdLst>
         </p14:section>
-        <p14:section name="Gate" id="{8e7779a1-e9e7-33e6-2487-8e599e45bd76}">
+        <p14:section name="Gate" id="{744e5af7-b1e2-7532-40bd-f50b9f67d34c}">
           <p14:sldIdLst>
             <p14:sldId id="257"/>
             <p14:sldId id="258"/>
           </p14:sldIdLst>
         </p14:section>
-        <p14:section name="Pre-teach" id="{4d49f9e4-1f24-b222-42ba-7ee09ed1e50c}">
+        <p14:section name="Pre-teach" id="{6cbce580-0026-981f-a57a-8c05c6c8f676}">
           <p14:sldIdLst>
             <p14:sldId id="259"/>
             <p14:sldId id="260"/>
           </p14:sldIdLst>
         </p14:section>
-        <p14:section name="Read-along" id="{bcf74ec7-80c3-0841-4e05-bb2197ad90dc}">
+        <p14:section name="Read-along" id="{8e102b35-1a9c-dd1b-edf8-49c959e9d7a4}">
           <p14:sldIdLst>
             <p14:sldId id="261"/>
             <p14:sldId id="262"/>
           </p14:sldIdLst>
         </p14:section>
-        <p14:section name="Teach" id="{777d4f10-de02-0e9e-be4e-d47cf9513a97}">
+        <p14:section name="Teach" id="{31a4fc2c-f2c7-1720-7ccc-8fb0502dfb4e}">
           <p14:sldIdLst>
             <p14:sldId id="263"/>
             <p14:sldId id="264"/>
@@ -156,7 +156,7 @@
             <p14:sldId id="266"/>
           </p14:sldIdLst>
         </p14:section>
-        <p14:section name="Routes" id="{0b30d418-fda5-fc15-d04a-53b36a0c31c1}">
+        <p14:section name="Routes" id="{2ca4e4e0-0e8f-eaee-4e9c-2cb6f1f4702f}">
           <p14:sldIdLst>
             <p14:sldId id="267"/>
             <p14:sldId id="268"/>
@@ -164,12 +164,12 @@
             <p14:sldId id="270"/>
           </p14:sldIdLst>
         </p14:section>
-        <p14:section name="Close" id="{dd007d20-325e-5ee5-7b0f-0f2213b3415f}">
+        <p14:section name="Close" id="{dd66b557-534c-98ba-e497-886f852db817}">
           <p14:sldIdLst>
             <p14:sldId id="271"/>
           </p14:sldIdLst>
         </p14:section>
-        <p14:section name="Answers" id="{99cfbea7-c141-f0e1-12b3-c7cb462a9202}">
+        <p14:section name="Answers" id="{3c9c0e76-1314-b157-ec35-a6c31925ee04}">
           <p14:sldIdLst>
             <p14:sldId id="272"/>
             <p14:sldId id="273"/>
